--- a/Диплом/Бородина_Анастасия_Владимировна_2207Д2.pptx
+++ b/Диплом/Бородина_Анастасия_Владимировна_2207Д2.pptx
@@ -220,7 +220,7 @@
             <a:fld id="{2CBAF322-1614-4B94-B6A1-B76658E349DC}" type="datetimeFigureOut">
               <a:rPr lang="ru-RU" smtClean="0"/>
               <a:pPr/>
-              <a:t>17.12.2025</a:t>
+              <a:t>18.12.2025</a:t>
             </a:fld>
             <a:endParaRPr lang="ru-RU"/>
           </a:p>
@@ -636,7 +636,7 @@
             <a:fld id="{C9392180-FD14-4913-9D18-66C9AD820358}" type="datetimeFigureOut">
               <a:rPr lang="ru-RU" smtClean="0"/>
               <a:pPr/>
-              <a:t>17.12.2025</a:t>
+              <a:t>18.12.2025</a:t>
             </a:fld>
             <a:endParaRPr lang="ru-RU"/>
           </a:p>
@@ -836,7 +836,7 @@
             <a:fld id="{C9392180-FD14-4913-9D18-66C9AD820358}" type="datetimeFigureOut">
               <a:rPr lang="ru-RU" smtClean="0"/>
               <a:pPr/>
-              <a:t>17.12.2025</a:t>
+              <a:t>18.12.2025</a:t>
             </a:fld>
             <a:endParaRPr lang="ru-RU"/>
           </a:p>
@@ -1046,7 +1046,7 @@
             <a:fld id="{C9392180-FD14-4913-9D18-66C9AD820358}" type="datetimeFigureOut">
               <a:rPr lang="ru-RU" smtClean="0"/>
               <a:pPr/>
-              <a:t>17.12.2025</a:t>
+              <a:t>18.12.2025</a:t>
             </a:fld>
             <a:endParaRPr lang="ru-RU"/>
           </a:p>
@@ -1246,7 +1246,7 @@
             <a:fld id="{C9392180-FD14-4913-9D18-66C9AD820358}" type="datetimeFigureOut">
               <a:rPr lang="ru-RU" smtClean="0"/>
               <a:pPr/>
-              <a:t>17.12.2025</a:t>
+              <a:t>18.12.2025</a:t>
             </a:fld>
             <a:endParaRPr lang="ru-RU"/>
           </a:p>
@@ -1523,7 +1523,7 @@
             <a:fld id="{C9392180-FD14-4913-9D18-66C9AD820358}" type="datetimeFigureOut">
               <a:rPr lang="ru-RU" smtClean="0"/>
               <a:pPr/>
-              <a:t>17.12.2025</a:t>
+              <a:t>18.12.2025</a:t>
             </a:fld>
             <a:endParaRPr lang="ru-RU"/>
           </a:p>
@@ -1790,7 +1790,7 @@
             <a:fld id="{C9392180-FD14-4913-9D18-66C9AD820358}" type="datetimeFigureOut">
               <a:rPr lang="ru-RU" smtClean="0"/>
               <a:pPr/>
-              <a:t>17.12.2025</a:t>
+              <a:t>18.12.2025</a:t>
             </a:fld>
             <a:endParaRPr lang="ru-RU"/>
           </a:p>
@@ -2204,7 +2204,7 @@
             <a:fld id="{C9392180-FD14-4913-9D18-66C9AD820358}" type="datetimeFigureOut">
               <a:rPr lang="ru-RU" smtClean="0"/>
               <a:pPr/>
-              <a:t>17.12.2025</a:t>
+              <a:t>18.12.2025</a:t>
             </a:fld>
             <a:endParaRPr lang="ru-RU"/>
           </a:p>
@@ -2347,7 +2347,7 @@
             <a:fld id="{C9392180-FD14-4913-9D18-66C9AD820358}" type="datetimeFigureOut">
               <a:rPr lang="ru-RU" smtClean="0"/>
               <a:pPr/>
-              <a:t>17.12.2025</a:t>
+              <a:t>18.12.2025</a:t>
             </a:fld>
             <a:endParaRPr lang="ru-RU"/>
           </a:p>
@@ -2462,7 +2462,7 @@
             <a:fld id="{C9392180-FD14-4913-9D18-66C9AD820358}" type="datetimeFigureOut">
               <a:rPr lang="ru-RU" smtClean="0"/>
               <a:pPr/>
-              <a:t>17.12.2025</a:t>
+              <a:t>18.12.2025</a:t>
             </a:fld>
             <a:endParaRPr lang="ru-RU"/>
           </a:p>
@@ -2775,7 +2775,7 @@
             <a:fld id="{C9392180-FD14-4913-9D18-66C9AD820358}" type="datetimeFigureOut">
               <a:rPr lang="ru-RU" smtClean="0"/>
               <a:pPr/>
-              <a:t>17.12.2025</a:t>
+              <a:t>18.12.2025</a:t>
             </a:fld>
             <a:endParaRPr lang="ru-RU"/>
           </a:p>
@@ -3065,7 +3065,7 @@
             <a:fld id="{C9392180-FD14-4913-9D18-66C9AD820358}" type="datetimeFigureOut">
               <a:rPr lang="ru-RU" smtClean="0"/>
               <a:pPr/>
-              <a:t>17.12.2025</a:t>
+              <a:t>18.12.2025</a:t>
             </a:fld>
             <a:endParaRPr lang="ru-RU"/>
           </a:p>
@@ -3308,7 +3308,7 @@
             <a:fld id="{C9392180-FD14-4913-9D18-66C9AD820358}" type="datetimeFigureOut">
               <a:rPr lang="ru-RU" smtClean="0"/>
               <a:pPr/>
-              <a:t>17.12.2025</a:t>
+              <a:t>18.12.2025</a:t>
             </a:fld>
             <a:endParaRPr lang="ru-RU"/>
           </a:p>
@@ -4369,7 +4369,7 @@
           <a:lstStyle/>
           <a:p>
             <a:r>
-              <a:rPr lang="ru-RU" dirty="0"/>
+              <a:rPr lang="ru-RU" b="1" dirty="0"/>
               <a:t>Заключение</a:t>
             </a:r>
           </a:p>
@@ -4410,113 +4410,89 @@
               <a:buNone/>
             </a:pPr>
             <a:r>
-              <a:rPr lang="ru-RU" sz="1500" dirty="0">
+              <a:rPr lang="ru-RU" sz="2000" dirty="0">
                 <a:solidFill>
                   <a:srgbClr val="000000"/>
                 </a:solidFill>
                 <a:ea typeface="Cambria" panose="02040503050406030204" pitchFamily="18" charset="0"/>
               </a:rPr>
-              <a:t>В ходе реализации поставленной цели были выполнены следующие задачи:</a:t>
-            </a:r>
-            <a:endParaRPr lang="ru-RU" sz="1500" dirty="0">
-              <a:ea typeface="Cambria" panose="02040503050406030204" pitchFamily="18" charset="0"/>
-            </a:endParaRPr>
-          </a:p>
-          <a:p>
-            <a:pPr marL="285750" lvl="0" indent="-285750">
+              <a:t>В данным момент в ходе реализации поставленной цели были выполнены следующие задачи:</a:t>
+            </a:r>
+          </a:p>
+          <a:p>
+            <a:pPr algn="just">
               <a:lnSpc>
                 <a:spcPct val="150000"/>
               </a:lnSpc>
-              <a:tabLst>
-                <a:tab pos="630555" algn="l"/>
-              </a:tabLst>
             </a:pPr>
             <a:r>
-              <a:rPr lang="ru-RU" sz="1500" dirty="0">
+              <a:rPr lang="ru-RU" sz="2000" dirty="0">
+                <a:solidFill>
+                  <a:srgbClr val="000000"/>
+                </a:solidFill>
                 <a:ea typeface="Cambria" panose="02040503050406030204" pitchFamily="18" charset="0"/>
               </a:rPr>
-              <a:t>Разработана архитектура системы согласно требованиям заказчика.</a:t>
-            </a:r>
-          </a:p>
-          <a:p>
-            <a:pPr marL="285750" lvl="0" indent="-285750">
+              <a:t>Выявлены ключевые потребности, которые должен покрывать продукт.</a:t>
+            </a:r>
+          </a:p>
+          <a:p>
+            <a:pPr algn="just">
               <a:lnSpc>
                 <a:spcPct val="150000"/>
               </a:lnSpc>
-              <a:tabLst>
-                <a:tab pos="630555" algn="l"/>
-              </a:tabLst>
             </a:pPr>
             <a:r>
-              <a:rPr lang="ru-RU" sz="1500" dirty="0">
+              <a:rPr lang="ru-RU" sz="2000" dirty="0">
+                <a:solidFill>
+                  <a:srgbClr val="000000"/>
+                </a:solidFill>
                 <a:ea typeface="Cambria" panose="02040503050406030204" pitchFamily="18" charset="0"/>
               </a:rPr>
-              <a:t>Разработана серверная и клиент часть веб-приложения.</a:t>
-            </a:r>
-          </a:p>
-          <a:p>
-            <a:pPr marL="285750" lvl="0" indent="-285750">
+              <a:t>Разработка технического задания и согласование с заказчиком, внесение правок в ТЗ. </a:t>
+            </a:r>
+          </a:p>
+          <a:p>
+            <a:pPr algn="just">
               <a:lnSpc>
                 <a:spcPct val="150000"/>
               </a:lnSpc>
-              <a:tabLst>
-                <a:tab pos="630555" algn="l"/>
-              </a:tabLst>
             </a:pPr>
             <a:r>
-              <a:rPr lang="ru-RU" sz="1500" dirty="0">
+              <a:rPr lang="ru-RU" sz="2000" dirty="0">
+                <a:solidFill>
+                  <a:srgbClr val="000000"/>
+                </a:solidFill>
                 <a:ea typeface="Cambria" panose="02040503050406030204" pitchFamily="18" charset="0"/>
               </a:rPr>
-              <a:t>Разработан функционал аутентификации.</a:t>
-            </a:r>
-          </a:p>
-          <a:p>
-            <a:pPr marL="285750" lvl="0" indent="-285750">
+              <a:t>Разработка макета веб-клиента, диаграмм. </a:t>
+            </a:r>
+          </a:p>
+          <a:p>
+            <a:pPr algn="just">
               <a:lnSpc>
                 <a:spcPct val="150000"/>
               </a:lnSpc>
-              <a:tabLst>
-                <a:tab pos="630555" algn="l"/>
-              </a:tabLst>
             </a:pPr>
-            <a:r>
-              <a:rPr lang="ru-RU" sz="1500" dirty="0">
-                <a:ea typeface="Cambria" panose="02040503050406030204" pitchFamily="18" charset="0"/>
-              </a:rPr>
-              <a:t>Разработан функционал клонирования, удаления, мониторинга.</a:t>
-            </a:r>
-          </a:p>
-          <a:p>
-            <a:pPr marL="285750" lvl="0" indent="-285750">
+            <a:endParaRPr lang="ru-RU" sz="1500" dirty="0">
+              <a:solidFill>
+                <a:srgbClr val="000000"/>
+              </a:solidFill>
+              <a:ea typeface="Cambria" panose="02040503050406030204" pitchFamily="18" charset="0"/>
+            </a:endParaRPr>
+          </a:p>
+          <a:p>
+            <a:pPr marL="0" indent="0" algn="just">
               <a:lnSpc>
                 <a:spcPct val="150000"/>
               </a:lnSpc>
-              <a:tabLst>
-                <a:tab pos="630555" algn="l"/>
-              </a:tabLst>
+              <a:buNone/>
             </a:pPr>
-            <a:r>
-              <a:rPr lang="ru-RU" sz="1500" dirty="0">
-                <a:ea typeface="Cambria" panose="02040503050406030204" pitchFamily="18" charset="0"/>
-              </a:rPr>
-              <a:t>Разработана служба агента для взаимодействия с СУБД</a:t>
-            </a:r>
-          </a:p>
-          <a:p>
-            <a:pPr marL="285750" lvl="0" indent="-285750">
-              <a:lnSpc>
-                <a:spcPct val="150000"/>
-              </a:lnSpc>
-              <a:tabLst>
-                <a:tab pos="630555" algn="l"/>
-              </a:tabLst>
-            </a:pPr>
-            <a:r>
-              <a:rPr lang="ru-RU" sz="1500" dirty="0">
-                <a:ea typeface="Cambria" panose="02040503050406030204" pitchFamily="18" charset="0"/>
-              </a:rPr>
-              <a:t>Проведено тестирование и оптимизация кода.</a:t>
-            </a:r>
+            <a:endParaRPr lang="ru-RU" sz="1500" dirty="0">
+              <a:solidFill>
+                <a:srgbClr val="000000"/>
+              </a:solidFill>
+              <a:ea typeface="Cambria" panose="02040503050406030204" pitchFamily="18" charset="0"/>
+            </a:endParaRPr>
           </a:p>
         </p:txBody>
       </p:sp>
@@ -4550,36 +4526,6 @@
           <a:chExt cx="0" cy="0"/>
         </a:xfrm>
       </p:grpSpPr>
-      <p:pic>
-        <p:nvPicPr>
-          <p:cNvPr id="4" name="Рисунок 3">
-            <a:extLst>
-              <a:ext uri="{FF2B5EF4-FFF2-40B4-BE49-F238E27FC236}">
-                <a16:creationId xmlns:a16="http://schemas.microsoft.com/office/drawing/2014/main" id="{2FED5B07-4905-05FE-91BB-46265DD9A621}"/>
-              </a:ext>
-            </a:extLst>
-          </p:cNvPr>
-          <p:cNvPicPr>
-            <a:picLocks noChangeAspect="1"/>
-          </p:cNvPicPr>
-          <p:nvPr/>
-        </p:nvPicPr>
-        <p:blipFill>
-          <a:blip r:embed="rId2"/>
-          <a:stretch>
-            <a:fillRect/>
-          </a:stretch>
-        </p:blipFill>
-        <p:spPr>
-          <a:xfrm>
-            <a:off x="920809" y="5835832"/>
-            <a:ext cx="1411432" cy="792070"/>
-          </a:xfrm>
-          <a:prstGeom prst="rect">
-            <a:avLst/>
-          </a:prstGeom>
-        </p:spPr>
-      </p:pic>
       <p:sp>
         <p:nvSpPr>
           <p:cNvPr id="2" name="Заголовок 1">
@@ -4607,7 +4553,7 @@
           <a:lstStyle/>
           <a:p>
             <a:r>
-              <a:rPr lang="ru-RU" dirty="0"/>
+              <a:rPr lang="ru-RU" b="1" dirty="0"/>
               <a:t>Актуальность</a:t>
             </a:r>
           </a:p>
@@ -4674,8 +4620,8 @@
         </p:nvSpPr>
         <p:spPr>
           <a:xfrm>
-            <a:off x="755072" y="1681233"/>
-            <a:ext cx="9810403" cy="4247317"/>
+            <a:off x="838201" y="1687341"/>
+            <a:ext cx="5906728" cy="923330"/>
           </a:xfrm>
           <a:prstGeom prst="rect">
             <a:avLst/>
@@ -4698,45 +4644,11 @@
             </a:r>
             <a:r>
               <a:rPr lang="ru-RU" dirty="0"/>
-              <a:t>Администраторам и разработчикам баз данных важно иметь доступ к актуальным, но изолированным копиям рабочих БД. Им требуется создавать «клон» рабочей базы для отладки, тестирования и анализа производительности. Однако стандартные инструменты SQL Server (например, RESTORE DATABASE) неэффективны при работе с большими базами (объёмом от 25 ГБ и выше). Процесс полного восстановления может занимать несколько часов.</a:t>
-            </a:r>
-          </a:p>
-          <a:p>
-            <a:r>
-              <a:rPr lang="ru-RU" dirty="0"/>
-              <a:t>Для решения этой проблемы в компании были разработаны PowerShell-скрипты, позволяющие использовать технологию виртуальных дисков (VHD) для создания клонов образа. Это значительно ускорило процесс, но породило новую проблему.</a:t>
-            </a:r>
-          </a:p>
-          <a:p>
+              <a:t>Разработчикам БД нужен доступ к копиям рабочих баз.</a:t>
+            </a:r>
             <a:br>
               <a:rPr lang="ru-RU" dirty="0"/>
             </a:br>
-            <a:r>
-              <a:rPr lang="ru-RU" b="1" dirty="0"/>
-              <a:t>Проблема: </a:t>
-            </a:r>
-            <a:r>
-              <a:rPr lang="ru-RU" dirty="0"/>
-              <a:t>На сегодняшний день разработчики вынуждены вручную запускать несколько скриптов PowerShell для выполнения операций </a:t>
-            </a:r>
-            <a:r>
-              <a:rPr lang="en-US" dirty="0"/>
-              <a:t>c</a:t>
-            </a:r>
-            <a:r>
-              <a:rPr lang="ru-RU" dirty="0"/>
-              <a:t>оздание VHD-образа, развёртывание клонов. Этот процесс требует технических знаний, высокой концентрации и времени. Отсутствует централизованное управление, контроль за использованием дискового пространства, проверка доступности серверов</a:t>
-            </a:r>
-            <a:r>
-              <a:rPr lang="en-US" dirty="0"/>
-              <a:t> </a:t>
-            </a:r>
-            <a:r>
-              <a:rPr lang="ru-RU" dirty="0"/>
-              <a:t>и т.д. Все это приводит к ошибкам, задержкам и потере рабочего времени.</a:t>
-            </a:r>
-          </a:p>
-          <a:p>
             <a:endParaRPr lang="ru-RU" dirty="0"/>
           </a:p>
         </p:txBody>
@@ -4756,7 +4668,7 @@
           <p:nvPr/>
         </p:nvPicPr>
         <p:blipFill>
-          <a:blip r:embed="rId3">
+          <a:blip r:embed="rId2">
             <a:extLst>
               <a:ext uri="{28A0092B-C50C-407E-A947-70E740481C1C}">
                 <a14:useLocalDpi xmlns:a14="http://schemas.microsoft.com/office/drawing/2010/main" val="0"/>
@@ -4770,8 +4682,8 @@
         </p:blipFill>
         <p:spPr bwMode="auto">
           <a:xfrm>
-            <a:off x="2792908" y="5752407"/>
-            <a:ext cx="1079687" cy="872800"/>
+            <a:off x="4000506" y="3168324"/>
+            <a:ext cx="3578494" cy="2892792"/>
           </a:xfrm>
           <a:prstGeom prst="rect">
             <a:avLst/>
@@ -4840,7 +4752,7 @@
           <a:lstStyle/>
           <a:p>
             <a:r>
-              <a:rPr lang="ru-RU" dirty="0"/>
+              <a:rPr lang="ru-RU" b="1" dirty="0"/>
               <a:t>Цель и задачи</a:t>
             </a:r>
           </a:p>
@@ -4870,7 +4782,7 @@
         </p:spPr>
         <p:txBody>
           <a:bodyPr>
-            <a:normAutofit fontScale="92500" lnSpcReduction="20000"/>
+            <a:normAutofit/>
           </a:bodyPr>
           <a:lstStyle/>
           <a:p>
@@ -4881,13 +4793,17 @@
             </a:pPr>
             <a:r>
               <a:rPr lang="ru-RU" dirty="0"/>
-              <a:t>Цель работы: Разработка системы централизованного управления копиями баз данных MS SQL с возможностью создания образов и развёртывания клонов через веб-интерфейс на .NET Core и Blazor</a:t>
-            </a:r>
-            <a:r>
-              <a:rPr lang="en-US" dirty="0"/>
+              <a:t>Цель работы: </a:t>
+            </a:r>
+            <a:r>
+              <a:rPr lang="ru-RU" sz="2000" dirty="0"/>
+              <a:t>Разработка системы централизованного управления копиями баз данных MS SQL с возможностью создания образов и развёртывания клонов через веб-интерфейс на .NET Core и Blazor</a:t>
+            </a:r>
+            <a:r>
+              <a:rPr lang="en-US" sz="2000" dirty="0"/>
               <a:t>.</a:t>
             </a:r>
-            <a:endParaRPr lang="ru-RU" dirty="0"/>
+            <a:endParaRPr lang="ru-RU" sz="2000" dirty="0"/>
           </a:p>
           <a:p>
             <a:pPr>
@@ -4910,22 +4826,13 @@
               </a:tabLst>
             </a:pPr>
             <a:r>
-              <a:rPr lang="ru-RU" sz="2000" b="1" dirty="0">
-                <a:solidFill>
-                  <a:srgbClr val="000000"/>
-                </a:solidFill>
-                <a:ea typeface="Cambria" panose="02040503050406030204" pitchFamily="18" charset="0"/>
-              </a:rPr>
-              <a:t>Реализация функционала агента Windows Service </a:t>
-            </a:r>
-            <a:r>
               <a:rPr lang="ru-RU" sz="2000" dirty="0">
                 <a:solidFill>
                   <a:srgbClr val="000000"/>
                 </a:solidFill>
                 <a:ea typeface="Cambria" panose="02040503050406030204" pitchFamily="18" charset="0"/>
               </a:rPr>
-              <a:t>для взаимодействия с СУБД.</a:t>
+              <a:t>Реализация функционала службы-агента</a:t>
             </a:r>
           </a:p>
           <a:p>
@@ -4938,22 +4845,13 @@
               </a:tabLst>
             </a:pPr>
             <a:r>
-              <a:rPr lang="ru-RU" sz="2000" b="1" dirty="0">
+              <a:rPr lang="ru-RU" sz="2000" dirty="0">
                 <a:solidFill>
                   <a:srgbClr val="000000"/>
                 </a:solidFill>
                 <a:ea typeface="Cambria" panose="02040503050406030204" pitchFamily="18" charset="0"/>
               </a:rPr>
               <a:t>Разработка клиентской (браузерной) части веб-приложения </a:t>
-            </a:r>
-            <a:r>
-              <a:rPr lang="ru-RU" sz="2000" dirty="0">
-                <a:solidFill>
-                  <a:srgbClr val="000000"/>
-                </a:solidFill>
-                <a:ea typeface="Cambria" panose="02040503050406030204" pitchFamily="18" charset="0"/>
-              </a:rPr>
-              <a:t>на Blazor Server, предоставляющей интерфейс для создания/удаления образов и клонов, а также мониторинга их состояния.</a:t>
             </a:r>
           </a:p>
           <a:p>
@@ -4966,22 +4864,13 @@
               </a:tabLst>
             </a:pPr>
             <a:r>
-              <a:rPr lang="ru-RU" sz="2000" b="1" dirty="0">
+              <a:rPr lang="ru-RU" sz="2000" dirty="0">
                 <a:solidFill>
                   <a:srgbClr val="000000"/>
                 </a:solidFill>
                 <a:ea typeface="Cambria" panose="02040503050406030204" pitchFamily="18" charset="0"/>
               </a:rPr>
               <a:t>Разработка серверной части веб-приложения </a:t>
-            </a:r>
-            <a:r>
-              <a:rPr lang="ru-RU" sz="2000" dirty="0">
-                <a:solidFill>
-                  <a:srgbClr val="000000"/>
-                </a:solidFill>
-                <a:ea typeface="Cambria" panose="02040503050406030204" pitchFamily="18" charset="0"/>
-              </a:rPr>
-              <a:t>на ASP.NET Core для реализации бизнес-логики, взаимодействия с агентом, управления метаданными и обеспечения безопасности доступа.</a:t>
             </a:r>
           </a:p>
           <a:p>
@@ -4994,22 +4883,13 @@
               </a:tabLst>
             </a:pPr>
             <a:r>
-              <a:rPr lang="ru-RU" sz="2000" b="1" dirty="0">
+              <a:rPr lang="ru-RU" sz="2000" dirty="0">
                 <a:solidFill>
                   <a:srgbClr val="000000"/>
                 </a:solidFill>
                 <a:ea typeface="Cambria" panose="02040503050406030204" pitchFamily="18" charset="0"/>
               </a:rPr>
               <a:t>Тестирование и отладка веб-приложения</a:t>
-            </a:r>
-            <a:r>
-              <a:rPr lang="ru-RU" sz="2000" dirty="0">
-                <a:solidFill>
-                  <a:srgbClr val="000000"/>
-                </a:solidFill>
-                <a:ea typeface="Cambria" panose="02040503050406030204" pitchFamily="18" charset="0"/>
-              </a:rPr>
-              <a:t>, включая проверку корректности создания образов и клонов, обработки ошибок.</a:t>
             </a:r>
             <a:endParaRPr lang="ru-RU" sz="2000" dirty="0">
               <a:ea typeface="Cambria" panose="02040503050406030204" pitchFamily="18" charset="0"/>
@@ -5076,8 +4956,8 @@
         </p:blipFill>
         <p:spPr bwMode="auto">
           <a:xfrm>
-            <a:off x="45719" y="3496228"/>
-            <a:ext cx="3200400" cy="3200400"/>
+            <a:off x="7822275" y="1325563"/>
+            <a:ext cx="4297680" cy="4297680"/>
           </a:xfrm>
           <a:prstGeom prst="rect">
             <a:avLst/>
@@ -5113,7 +4993,7 @@
         <p:spPr>
           <a:xfrm>
             <a:off x="838200" y="0"/>
-            <a:ext cx="10515600" cy="1325563"/>
+            <a:ext cx="10515600" cy="1681316"/>
           </a:xfrm>
         </p:spPr>
         <p:txBody>
@@ -5121,74 +5001,13 @@
           <a:lstStyle/>
           <a:p>
             <a:r>
-              <a:rPr lang="ru-RU" dirty="0"/>
+              <a:rPr lang="ru-RU" b="1" dirty="0">
+                <a:solidFill>
+                  <a:srgbClr val="C00000"/>
+                </a:solidFill>
+                <a:latin typeface="+mn-lt"/>
+              </a:rPr>
               <a:t>Аналоги</a:t>
-            </a:r>
-          </a:p>
-        </p:txBody>
-      </p:sp>
-      <p:sp>
-        <p:nvSpPr>
-          <p:cNvPr id="9" name="TextBox 8">
-            <a:extLst>
-              <a:ext uri="{FF2B5EF4-FFF2-40B4-BE49-F238E27FC236}">
-                <a16:creationId xmlns:a16="http://schemas.microsoft.com/office/drawing/2014/main" id="{3B6C9E6A-12CC-415A-AFC3-5253464C3445}"/>
-              </a:ext>
-            </a:extLst>
-          </p:cNvPr>
-          <p:cNvSpPr txBox="1"/>
-          <p:nvPr/>
-        </p:nvSpPr>
-        <p:spPr>
-          <a:xfrm>
-            <a:off x="3244735" y="4070263"/>
-            <a:ext cx="8055032" cy="1754326"/>
-          </a:xfrm>
-          <a:prstGeom prst="rect">
-            <a:avLst/>
-          </a:prstGeom>
-          <a:noFill/>
-        </p:spPr>
-        <p:txBody>
-          <a:bodyPr wrap="square" rtlCol="0">
-            <a:spAutoFit/>
-          </a:bodyPr>
-          <a:lstStyle/>
-          <a:p>
-            <a:r>
-              <a:rPr lang="ru-RU" dirty="0"/>
-              <a:t>+ Облачное решение от </a:t>
-            </a:r>
-            <a:r>
-              <a:rPr lang="en-US" dirty="0"/>
-              <a:t>Microsoft.</a:t>
-            </a:r>
-            <a:r>
-              <a:rPr lang="ru-RU" dirty="0"/>
-              <a:t> Встроенные механизмы восстановления и клонирования. Полная изоляция, автоматическое резервное копирование, масштабируемость.</a:t>
-            </a:r>
-          </a:p>
-          <a:p>
-            <a:r>
-              <a:rPr lang="ru-RU" dirty="0"/>
-              <a:t>- Требует миграции в облако Azure.</a:t>
-            </a:r>
-          </a:p>
-          <a:p>
-            <a:r>
-              <a:rPr lang="ru-RU" dirty="0"/>
-              <a:t>- Нет прямого контроля над VHD-файлами.</a:t>
-            </a:r>
-            <a:br>
-              <a:rPr lang="en-US" dirty="0"/>
-            </a:br>
-            <a:r>
-              <a:rPr lang="en-US" dirty="0"/>
-              <a:t>- </a:t>
-            </a:r>
-            <a:r>
-              <a:rPr lang="ru-RU" dirty="0"/>
-              <a:t>Стоимость может быть высокой при частом создании/удалении клонов</a:t>
             </a:r>
           </a:p>
         </p:txBody>
@@ -5222,7 +5041,7 @@
         </p:blipFill>
         <p:spPr bwMode="auto">
           <a:xfrm>
-            <a:off x="648510" y="1229557"/>
+            <a:off x="862250" y="2040024"/>
             <a:ext cx="2079131" cy="2132215"/>
           </a:xfrm>
           <a:prstGeom prst="rect">
@@ -5254,7 +5073,7 @@
         </p:nvSpPr>
         <p:spPr>
           <a:xfrm>
-            <a:off x="838200" y="3429000"/>
+            <a:off x="910351" y="4341456"/>
             <a:ext cx="2031030" cy="369332"/>
           </a:xfrm>
           <a:prstGeom prst="rect">
@@ -5298,8 +5117,8 @@
         </p:nvSpPr>
         <p:spPr>
           <a:xfrm>
-            <a:off x="3244735" y="1570902"/>
-            <a:ext cx="6871854" cy="1754326"/>
+            <a:off x="3527877" y="2651126"/>
+            <a:ext cx="5136245" cy="1200329"/>
           </a:xfrm>
           <a:prstGeom prst="rect">
             <a:avLst/>
@@ -5314,26 +5133,7 @@
           <a:p>
             <a:r>
               <a:rPr lang="ru-RU" dirty="0"/>
-              <a:t>+ Расширенный функционал - специализированный инструмент с развитым UI, поддержкой командной строки, интеграцией с CI/CD</a:t>
-            </a:r>
-            <a:br>
-              <a:rPr lang="en-US" dirty="0"/>
-            </a:br>
-            <a:r>
-              <a:rPr lang="en-US" dirty="0"/>
-              <a:t>-  </a:t>
-            </a:r>
-            <a:r>
-              <a:rPr lang="ru-RU" dirty="0"/>
-              <a:t>Высокая стоимость лицензий, особенно при масштабировании на множество серверов и пользователей.</a:t>
-            </a:r>
-            <a:r>
-              <a:rPr lang="en-US" dirty="0"/>
-              <a:t> </a:t>
-            </a:r>
-            <a:r>
-              <a:rPr lang="ru-RU" dirty="0"/>
-              <a:t>Нет возможности приобрести ПО в России.</a:t>
+              <a:t>На рынке существуют альтернативные решения, но заказчику они не подходят, так нет возможности приобрести лицензию в РФ.</a:t>
             </a:r>
           </a:p>
           <a:p>
@@ -5357,6 +5157,26 @@
 <file path=ppt/slides/slide5.xml><?xml version="1.0" encoding="utf-8"?>
 <p:sld xmlns:a="http://schemas.openxmlformats.org/drawingml/2006/main" xmlns:r="http://schemas.openxmlformats.org/officeDocument/2006/relationships" xmlns:p="http://schemas.openxmlformats.org/presentationml/2006/main">
   <p:cSld>
+    <p:bg>
+      <p:bgPr>
+        <a:gradFill flip="none" rotWithShape="1">
+          <a:gsLst>
+            <a:gs pos="0">
+              <a:schemeClr val="accent1">
+                <a:lumMod val="5000"/>
+                <a:lumOff val="95000"/>
+              </a:schemeClr>
+            </a:gs>
+            <a:gs pos="0">
+              <a:schemeClr val="bg1"/>
+            </a:gs>
+          </a:gsLst>
+          <a:lin ang="13500000" scaled="1"/>
+          <a:tileRect/>
+        </a:gradFill>
+        <a:effectLst/>
+      </p:bgPr>
+    </p:bg>
     <p:spTree>
       <p:nvGrpSpPr>
         <p:cNvPr id="1" name=""/>
@@ -5387,69 +5207,25 @@
             <p:ph type="title"/>
           </p:nvPr>
         </p:nvSpPr>
-        <p:spPr/>
-        <p:txBody>
-          <a:bodyPr/>
-          <a:lstStyle/>
-          <a:p>
-            <a:r>
-              <a:rPr lang="ru-RU" dirty="0"/>
-              <a:t>Программные средства разработки</a:t>
-            </a:r>
-          </a:p>
-        </p:txBody>
-      </p:sp>
-      <p:sp>
-        <p:nvSpPr>
-          <p:cNvPr id="17" name="TextBox 16">
-            <a:extLst>
-              <a:ext uri="{FF2B5EF4-FFF2-40B4-BE49-F238E27FC236}">
-                <a16:creationId xmlns:a16="http://schemas.microsoft.com/office/drawing/2014/main" id="{BFA23089-62F2-4EEA-B036-CA898FC9961E}"/>
-              </a:ext>
-            </a:extLst>
-          </p:cNvPr>
-          <p:cNvSpPr txBox="1"/>
-          <p:nvPr/>
-        </p:nvSpPr>
         <p:spPr>
           <a:xfrm>
-            <a:off x="8634152" y="1891945"/>
-            <a:ext cx="3167110" cy="923330"/>
+            <a:off x="1210359" y="271479"/>
+            <a:ext cx="10515600" cy="1325563"/>
           </a:xfrm>
-          <a:prstGeom prst="rect">
-            <a:avLst/>
-          </a:prstGeom>
-          <a:noFill/>
         </p:spPr>
         <p:txBody>
-          <a:bodyPr wrap="square" rtlCol="0">
-            <a:spAutoFit/>
-          </a:bodyPr>
-          <a:lstStyle/>
-          <a:p>
-            <a:r>
-              <a:rPr lang="en-US" dirty="0"/>
-              <a:t>Visual Studio </a:t>
-            </a:r>
-            <a:r>
-              <a:rPr lang="ru-RU" dirty="0"/>
-              <a:t>-</a:t>
-            </a:r>
-            <a:r>
-              <a:rPr lang="en-US" dirty="0"/>
-              <a:t> IDE </a:t>
-            </a:r>
-            <a:r>
-              <a:rPr lang="ru-RU" dirty="0"/>
-              <a:t>для разработки клиентской</a:t>
-            </a:r>
-            <a:r>
-              <a:rPr lang="en-US" dirty="0"/>
-              <a:t> </a:t>
-            </a:r>
-            <a:r>
-              <a:rPr lang="ru-RU" dirty="0"/>
-              <a:t>и серверной части.</a:t>
+          <a:bodyPr/>
+          <a:lstStyle/>
+          <a:p>
+            <a:r>
+              <a:rPr lang="ru-RU" b="1" dirty="0">
+                <a:solidFill>
+                  <a:srgbClr val="662E93"/>
+                </a:solidFill>
+                <a:latin typeface="+mn-lt"/>
+                <a:cs typeface="Times New Roman" panose="02020603050405020304" pitchFamily="18" charset="0"/>
+              </a:rPr>
+              <a:t>Программные средства разработки</a:t>
             </a:r>
           </a:p>
         </p:txBody>
@@ -5483,7 +5259,7 @@
         </p:blipFill>
         <p:spPr bwMode="auto">
           <a:xfrm>
-            <a:off x="6619358" y="1690687"/>
+            <a:off x="5123182" y="2055768"/>
             <a:ext cx="1830976" cy="1373232"/>
           </a:xfrm>
           <a:prstGeom prst="rect">
@@ -5530,7 +5306,7 @@
         </p:blipFill>
         <p:spPr bwMode="auto">
           <a:xfrm>
-            <a:off x="1180239" y="1690687"/>
+            <a:off x="5166104" y="4209304"/>
             <a:ext cx="1745132" cy="1410735"/>
           </a:xfrm>
           <a:prstGeom prst="rect">
@@ -5548,45 +5324,6 @@
           </a:extLst>
         </p:spPr>
       </p:pic>
-      <p:sp>
-        <p:nvSpPr>
-          <p:cNvPr id="14" name="TextBox 13">
-            <a:extLst>
-              <a:ext uri="{FF2B5EF4-FFF2-40B4-BE49-F238E27FC236}">
-                <a16:creationId xmlns:a16="http://schemas.microsoft.com/office/drawing/2014/main" id="{BB542EF8-BED0-C8BC-8A9B-4452A07E0AF4}"/>
-              </a:ext>
-            </a:extLst>
-          </p:cNvPr>
-          <p:cNvSpPr txBox="1"/>
-          <p:nvPr/>
-        </p:nvSpPr>
-        <p:spPr>
-          <a:xfrm>
-            <a:off x="3175679" y="1831198"/>
-            <a:ext cx="2920321" cy="646331"/>
-          </a:xfrm>
-          <a:prstGeom prst="rect">
-            <a:avLst/>
-          </a:prstGeom>
-          <a:noFill/>
-        </p:spPr>
-        <p:txBody>
-          <a:bodyPr wrap="square" rtlCol="0">
-            <a:spAutoFit/>
-          </a:bodyPr>
-          <a:lstStyle/>
-          <a:p>
-            <a:r>
-              <a:rPr lang="en-US" dirty="0"/>
-              <a:t>MSSQL – </a:t>
-            </a:r>
-            <a:r>
-              <a:rPr lang="ru-RU" dirty="0"/>
-              <a:t>СУБД с которым будет работать агент.</a:t>
-            </a:r>
-          </a:p>
-        </p:txBody>
-      </p:sp>
       <p:pic>
         <p:nvPicPr>
           <p:cNvPr id="23" name="Рисунок 22">
@@ -5609,7 +5346,7 @@
         </p:blipFill>
         <p:spPr>
           <a:xfrm>
-            <a:off x="6889571" y="3489961"/>
+            <a:off x="8961004" y="2138450"/>
             <a:ext cx="1290550" cy="1290550"/>
           </a:xfrm>
           <a:prstGeom prst="rect">
@@ -5617,53 +5354,6 @@
           </a:prstGeom>
         </p:spPr>
       </p:pic>
-      <p:sp>
-        <p:nvSpPr>
-          <p:cNvPr id="24" name="TextBox 23">
-            <a:extLst>
-              <a:ext uri="{FF2B5EF4-FFF2-40B4-BE49-F238E27FC236}">
-                <a16:creationId xmlns:a16="http://schemas.microsoft.com/office/drawing/2014/main" id="{4E48AB1A-E5CF-B731-D4D7-01F3E55D533F}"/>
-              </a:ext>
-            </a:extLst>
-          </p:cNvPr>
-          <p:cNvSpPr txBox="1"/>
-          <p:nvPr/>
-        </p:nvSpPr>
-        <p:spPr>
-          <a:xfrm>
-            <a:off x="8634152" y="3630471"/>
-            <a:ext cx="3167110" cy="923330"/>
-          </a:xfrm>
-          <a:prstGeom prst="rect">
-            <a:avLst/>
-          </a:prstGeom>
-          <a:noFill/>
-        </p:spPr>
-        <p:txBody>
-          <a:bodyPr wrap="square" rtlCol="0">
-            <a:spAutoFit/>
-          </a:bodyPr>
-          <a:lstStyle/>
-          <a:p>
-            <a:r>
-              <a:rPr lang="en-US" dirty="0"/>
-              <a:t>C#</a:t>
-            </a:r>
-            <a:r>
-              <a:rPr lang="ru-RU" dirty="0"/>
-              <a:t> -</a:t>
-            </a:r>
-            <a:r>
-              <a:rPr lang="en-US" dirty="0"/>
-              <a:t> </a:t>
-            </a:r>
-            <a:r>
-              <a:rPr lang="ru-RU" dirty="0"/>
-              <a:t>Язык программирования, используемый для написания продукта.</a:t>
-            </a:r>
-          </a:p>
-        </p:txBody>
-      </p:sp>
       <p:pic>
         <p:nvPicPr>
           <p:cNvPr id="30" name="Рисунок 29">
@@ -5686,7 +5376,7 @@
         </p:blipFill>
         <p:spPr>
           <a:xfrm>
-            <a:off x="1008208" y="3605647"/>
+            <a:off x="1253658" y="2055768"/>
             <a:ext cx="1948522" cy="1219730"/>
           </a:xfrm>
           <a:prstGeom prst="rect">
@@ -5696,10 +5386,10 @@
       </p:pic>
       <p:sp>
         <p:nvSpPr>
-          <p:cNvPr id="31" name="TextBox 30">
-            <a:extLst>
-              <a:ext uri="{FF2B5EF4-FFF2-40B4-BE49-F238E27FC236}">
-                <a16:creationId xmlns:a16="http://schemas.microsoft.com/office/drawing/2014/main" id="{E74D11DA-3345-5EEE-EC4F-5A7048242065}"/>
+          <p:cNvPr id="2048" name="TextBox 2047">
+            <a:extLst>
+              <a:ext uri="{FF2B5EF4-FFF2-40B4-BE49-F238E27FC236}">
+                <a16:creationId xmlns:a16="http://schemas.microsoft.com/office/drawing/2014/main" id="{CF36CB90-3C93-5911-CCBE-41E2DA0AEB70}"/>
               </a:ext>
             </a:extLst>
           </p:cNvPr>
@@ -5708,8 +5398,8 @@
         </p:nvSpPr>
         <p:spPr>
           <a:xfrm>
-            <a:off x="3175679" y="3605647"/>
-            <a:ext cx="3110233" cy="1200329"/>
+            <a:off x="1210359" y="5751052"/>
+            <a:ext cx="2305925" cy="369332"/>
           </a:xfrm>
           <a:prstGeom prst="rect">
             <a:avLst/>
@@ -5724,50 +5414,7 @@
           <a:p>
             <a:r>
               <a:rPr lang="ru-RU" dirty="0"/>
-              <a:t>Blazor - это UI-фреймворк для создания интерактивных веб-приложений с использованием C# и .NET </a:t>
-            </a:r>
-          </a:p>
-        </p:txBody>
-      </p:sp>
-      <p:sp>
-        <p:nvSpPr>
-          <p:cNvPr id="2048" name="TextBox 2047">
-            <a:extLst>
-              <a:ext uri="{FF2B5EF4-FFF2-40B4-BE49-F238E27FC236}">
-                <a16:creationId xmlns:a16="http://schemas.microsoft.com/office/drawing/2014/main" id="{CF36CB90-3C93-5911-CCBE-41E2DA0AEB70}"/>
-              </a:ext>
-            </a:extLst>
-          </p:cNvPr>
-          <p:cNvSpPr txBox="1"/>
-          <p:nvPr/>
-        </p:nvSpPr>
-        <p:spPr>
-          <a:xfrm>
-            <a:off x="3080722" y="5167313"/>
-            <a:ext cx="3205190" cy="1200329"/>
-          </a:xfrm>
-          <a:prstGeom prst="rect">
-            <a:avLst/>
-          </a:prstGeom>
-          <a:noFill/>
-        </p:spPr>
-        <p:txBody>
-          <a:bodyPr wrap="square" rtlCol="0">
-            <a:spAutoFit/>
-          </a:bodyPr>
-          <a:lstStyle/>
-          <a:p>
-            <a:r>
-              <a:rPr lang="ru-RU" dirty="0"/>
-              <a:t>.NET Core </a:t>
-            </a:r>
-            <a:r>
-              <a:rPr lang="en-US" dirty="0"/>
-              <a:t>-</a:t>
-            </a:r>
-            <a:r>
-              <a:rPr lang="ru-RU" dirty="0"/>
-              <a:t> это платформа для разработки, предназначенная для создания приложений, включая веб(</a:t>
+              <a:t>.NET Core  (</a:t>
             </a:r>
             <a:r>
               <a:rPr lang="en-US" dirty="0"/>
@@ -5809,7 +5456,7 @@
         </p:blipFill>
         <p:spPr bwMode="auto">
           <a:xfrm>
-            <a:off x="1180239" y="5167313"/>
+            <a:off x="1517181" y="4149788"/>
             <a:ext cx="1421476" cy="1421476"/>
           </a:xfrm>
           <a:prstGeom prst="rect">
@@ -5856,8 +5503,8 @@
         </p:blipFill>
         <p:spPr bwMode="auto">
           <a:xfrm>
-            <a:off x="6435540" y="4963107"/>
-            <a:ext cx="2090683" cy="1529768"/>
+            <a:off x="8655922" y="4230586"/>
+            <a:ext cx="2018897" cy="1472402"/>
           </a:xfrm>
           <a:prstGeom prst="rect">
             <a:avLst/>
@@ -5874,57 +5521,6 @@
           </a:extLst>
         </p:spPr>
       </p:pic>
-      <p:sp>
-        <p:nvSpPr>
-          <p:cNvPr id="2049" name="TextBox 2048">
-            <a:extLst>
-              <a:ext uri="{FF2B5EF4-FFF2-40B4-BE49-F238E27FC236}">
-                <a16:creationId xmlns:a16="http://schemas.microsoft.com/office/drawing/2014/main" id="{AC8C7983-841F-6210-CD6A-7518D12EBA7B}"/>
-              </a:ext>
-            </a:extLst>
-          </p:cNvPr>
-          <p:cNvSpPr txBox="1"/>
-          <p:nvPr/>
-        </p:nvSpPr>
-        <p:spPr>
-          <a:xfrm>
-            <a:off x="8634152" y="5164364"/>
-            <a:ext cx="3167110" cy="923330"/>
-          </a:xfrm>
-          <a:prstGeom prst="rect">
-            <a:avLst/>
-          </a:prstGeom>
-          <a:noFill/>
-        </p:spPr>
-        <p:txBody>
-          <a:bodyPr wrap="square" rtlCol="0">
-            <a:spAutoFit/>
-          </a:bodyPr>
-          <a:lstStyle/>
-          <a:p>
-            <a:r>
-              <a:rPr lang="ru-RU" dirty="0"/>
-              <a:t> </a:t>
-            </a:r>
-            <a:r>
-              <a:rPr lang="en-US" dirty="0"/>
-              <a:t>HTML </a:t>
-            </a:r>
-            <a:r>
-              <a:rPr lang="ru-RU" dirty="0"/>
-              <a:t>и </a:t>
-            </a:r>
-            <a:r>
-              <a:rPr lang="en-US" dirty="0"/>
-              <a:t>CSS</a:t>
-            </a:r>
-            <a:r>
-              <a:rPr lang="ru-RU" dirty="0"/>
-              <a:t> - язык разметки, используемые для создания структуры веб-страниц.</a:t>
-            </a:r>
-          </a:p>
-        </p:txBody>
-      </p:sp>
     </p:spTree>
     <p:extLst>
       <p:ext uri="{BB962C8B-B14F-4D97-AF65-F5344CB8AC3E}">
@@ -5976,11 +5572,11 @@
           <a:lstStyle/>
           <a:p>
             <a:r>
-              <a:rPr lang="en-US" dirty="0"/>
+              <a:rPr lang="en-US" b="1" dirty="0"/>
               <a:t>UML </a:t>
             </a:r>
             <a:r>
-              <a:rPr lang="ru-RU" dirty="0"/>
+              <a:rPr lang="ru-RU" b="1" dirty="0"/>
               <a:t>диаграмма последовательности для процесса клонирования базы данных</a:t>
             </a:r>
           </a:p>
@@ -6063,7 +5659,7 @@
           <a:lstStyle/>
           <a:p>
             <a:r>
-              <a:rPr lang="ru-RU" dirty="0"/>
+              <a:rPr lang="ru-RU" b="1" dirty="0"/>
               <a:t>Диаграмма прецедентов</a:t>
             </a:r>
           </a:p>
